--- a/CRYPTOGRAPHY.pptx
+++ b/CRYPTOGRAPHY.pptx
@@ -335,7 +335,8 @@
           <a:p>
             <a:fld id="{96253BB2-4236-4F4F-977B-76D829312D18}" type="datetimeFigureOut">
               <a:rPr lang="en-IN" smtClean="0"/>
-              <a:t>16-08-2026</a:t>
+              <a:pPr/>
+              <a:t>17-08-2026</a:t>
             </a:fld>
             <a:endParaRPr lang="en-IN"/>
           </a:p>
@@ -377,6 +378,7 @@
           <a:p>
             <a:fld id="{007A1CCA-7602-43D0-8C0E-FEA430C1C9B3}" type="slidenum">
               <a:rPr lang="en-IN" smtClean="0"/>
+              <a:pPr/>
               <a:t>‹#›</a:t>
             </a:fld>
             <a:endParaRPr lang="en-IN"/>
@@ -386,7 +388,7 @@
     </p:spTree>
     <p:extLst>
       <p:ext uri="{BB962C8B-B14F-4D97-AF65-F5344CB8AC3E}">
-        <p14:creationId xmlns:p14="http://schemas.microsoft.com/office/powerpoint/2010/main" val="1948031871"/>
+        <p14:creationId xmlns:p14="http://schemas.microsoft.com/office/powerpoint/2010/main" xmlns="" val="1948031871"/>
       </p:ext>
     </p:extLst>
   </p:cSld>
@@ -505,7 +507,8 @@
           <a:p>
             <a:fld id="{96253BB2-4236-4F4F-977B-76D829312D18}" type="datetimeFigureOut">
               <a:rPr lang="en-IN" smtClean="0"/>
-              <a:t>16-08-2026</a:t>
+              <a:pPr/>
+              <a:t>17-08-2026</a:t>
             </a:fld>
             <a:endParaRPr lang="en-IN"/>
           </a:p>
@@ -547,6 +550,7 @@
           <a:p>
             <a:fld id="{007A1CCA-7602-43D0-8C0E-FEA430C1C9B3}" type="slidenum">
               <a:rPr lang="en-IN" smtClean="0"/>
+              <a:pPr/>
               <a:t>‹#›</a:t>
             </a:fld>
             <a:endParaRPr lang="en-IN"/>
@@ -556,7 +560,7 @@
     </p:spTree>
     <p:extLst>
       <p:ext uri="{BB962C8B-B14F-4D97-AF65-F5344CB8AC3E}">
-        <p14:creationId xmlns:p14="http://schemas.microsoft.com/office/powerpoint/2010/main" val="2882718361"/>
+        <p14:creationId xmlns:p14="http://schemas.microsoft.com/office/powerpoint/2010/main" xmlns="" val="2882718361"/>
       </p:ext>
     </p:extLst>
   </p:cSld>
@@ -685,7 +689,8 @@
           <a:p>
             <a:fld id="{96253BB2-4236-4F4F-977B-76D829312D18}" type="datetimeFigureOut">
               <a:rPr lang="en-IN" smtClean="0"/>
-              <a:t>16-08-2026</a:t>
+              <a:pPr/>
+              <a:t>17-08-2026</a:t>
             </a:fld>
             <a:endParaRPr lang="en-IN"/>
           </a:p>
@@ -727,6 +732,7 @@
           <a:p>
             <a:fld id="{007A1CCA-7602-43D0-8C0E-FEA430C1C9B3}" type="slidenum">
               <a:rPr lang="en-IN" smtClean="0"/>
+              <a:pPr/>
               <a:t>‹#›</a:t>
             </a:fld>
             <a:endParaRPr lang="en-IN"/>
@@ -736,7 +742,7 @@
     </p:spTree>
     <p:extLst>
       <p:ext uri="{BB962C8B-B14F-4D97-AF65-F5344CB8AC3E}">
-        <p14:creationId xmlns:p14="http://schemas.microsoft.com/office/powerpoint/2010/main" val="3667084252"/>
+        <p14:creationId xmlns:p14="http://schemas.microsoft.com/office/powerpoint/2010/main" xmlns="" val="3667084252"/>
       </p:ext>
     </p:extLst>
   </p:cSld>
@@ -855,7 +861,8 @@
           <a:p>
             <a:fld id="{96253BB2-4236-4F4F-977B-76D829312D18}" type="datetimeFigureOut">
               <a:rPr lang="en-IN" smtClean="0"/>
-              <a:t>16-08-2026</a:t>
+              <a:pPr/>
+              <a:t>17-08-2026</a:t>
             </a:fld>
             <a:endParaRPr lang="en-IN"/>
           </a:p>
@@ -897,6 +904,7 @@
           <a:p>
             <a:fld id="{007A1CCA-7602-43D0-8C0E-FEA430C1C9B3}" type="slidenum">
               <a:rPr lang="en-IN" smtClean="0"/>
+              <a:pPr/>
               <a:t>‹#›</a:t>
             </a:fld>
             <a:endParaRPr lang="en-IN"/>
@@ -906,7 +914,7 @@
     </p:spTree>
     <p:extLst>
       <p:ext uri="{BB962C8B-B14F-4D97-AF65-F5344CB8AC3E}">
-        <p14:creationId xmlns:p14="http://schemas.microsoft.com/office/powerpoint/2010/main" val="1613517298"/>
+        <p14:creationId xmlns:p14="http://schemas.microsoft.com/office/powerpoint/2010/main" xmlns="" val="1613517298"/>
       </p:ext>
     </p:extLst>
   </p:cSld>
@@ -1101,7 +1109,8 @@
           <a:p>
             <a:fld id="{96253BB2-4236-4F4F-977B-76D829312D18}" type="datetimeFigureOut">
               <a:rPr lang="en-IN" smtClean="0"/>
-              <a:t>16-08-2026</a:t>
+              <a:pPr/>
+              <a:t>17-08-2026</a:t>
             </a:fld>
             <a:endParaRPr lang="en-IN"/>
           </a:p>
@@ -1143,6 +1152,7 @@
           <a:p>
             <a:fld id="{007A1CCA-7602-43D0-8C0E-FEA430C1C9B3}" type="slidenum">
               <a:rPr lang="en-IN" smtClean="0"/>
+              <a:pPr/>
               <a:t>‹#›</a:t>
             </a:fld>
             <a:endParaRPr lang="en-IN"/>
@@ -1152,7 +1162,7 @@
     </p:spTree>
     <p:extLst>
       <p:ext uri="{BB962C8B-B14F-4D97-AF65-F5344CB8AC3E}">
-        <p14:creationId xmlns:p14="http://schemas.microsoft.com/office/powerpoint/2010/main" val="862822788"/>
+        <p14:creationId xmlns:p14="http://schemas.microsoft.com/office/powerpoint/2010/main" xmlns="" val="862822788"/>
       </p:ext>
     </p:extLst>
   </p:cSld>
@@ -1333,7 +1343,8 @@
           <a:p>
             <a:fld id="{96253BB2-4236-4F4F-977B-76D829312D18}" type="datetimeFigureOut">
               <a:rPr lang="en-IN" smtClean="0"/>
-              <a:t>16-08-2026</a:t>
+              <a:pPr/>
+              <a:t>17-08-2026</a:t>
             </a:fld>
             <a:endParaRPr lang="en-IN"/>
           </a:p>
@@ -1375,6 +1386,7 @@
           <a:p>
             <a:fld id="{007A1CCA-7602-43D0-8C0E-FEA430C1C9B3}" type="slidenum">
               <a:rPr lang="en-IN" smtClean="0"/>
+              <a:pPr/>
               <a:t>‹#›</a:t>
             </a:fld>
             <a:endParaRPr lang="en-IN"/>
@@ -1384,7 +1396,7 @@
     </p:spTree>
     <p:extLst>
       <p:ext uri="{BB962C8B-B14F-4D97-AF65-F5344CB8AC3E}">
-        <p14:creationId xmlns:p14="http://schemas.microsoft.com/office/powerpoint/2010/main" val="2530650798"/>
+        <p14:creationId xmlns:p14="http://schemas.microsoft.com/office/powerpoint/2010/main" xmlns="" val="2530650798"/>
       </p:ext>
     </p:extLst>
   </p:cSld>
@@ -1700,7 +1712,8 @@
           <a:p>
             <a:fld id="{96253BB2-4236-4F4F-977B-76D829312D18}" type="datetimeFigureOut">
               <a:rPr lang="en-IN" smtClean="0"/>
-              <a:t>16-08-2026</a:t>
+              <a:pPr/>
+              <a:t>17-08-2026</a:t>
             </a:fld>
             <a:endParaRPr lang="en-IN"/>
           </a:p>
@@ -1742,6 +1755,7 @@
           <a:p>
             <a:fld id="{007A1CCA-7602-43D0-8C0E-FEA430C1C9B3}" type="slidenum">
               <a:rPr lang="en-IN" smtClean="0"/>
+              <a:pPr/>
               <a:t>‹#›</a:t>
             </a:fld>
             <a:endParaRPr lang="en-IN"/>
@@ -1751,7 +1765,7 @@
     </p:spTree>
     <p:extLst>
       <p:ext uri="{BB962C8B-B14F-4D97-AF65-F5344CB8AC3E}">
-        <p14:creationId xmlns:p14="http://schemas.microsoft.com/office/powerpoint/2010/main" val="3970040355"/>
+        <p14:creationId xmlns:p14="http://schemas.microsoft.com/office/powerpoint/2010/main" xmlns="" val="3970040355"/>
       </p:ext>
     </p:extLst>
   </p:cSld>
@@ -1818,7 +1832,8 @@
           <a:p>
             <a:fld id="{96253BB2-4236-4F4F-977B-76D829312D18}" type="datetimeFigureOut">
               <a:rPr lang="en-IN" smtClean="0"/>
-              <a:t>16-08-2026</a:t>
+              <a:pPr/>
+              <a:t>17-08-2026</a:t>
             </a:fld>
             <a:endParaRPr lang="en-IN"/>
           </a:p>
@@ -1860,6 +1875,7 @@
           <a:p>
             <a:fld id="{007A1CCA-7602-43D0-8C0E-FEA430C1C9B3}" type="slidenum">
               <a:rPr lang="en-IN" smtClean="0"/>
+              <a:pPr/>
               <a:t>‹#›</a:t>
             </a:fld>
             <a:endParaRPr lang="en-IN"/>
@@ -1869,7 +1885,7 @@
     </p:spTree>
     <p:extLst>
       <p:ext uri="{BB962C8B-B14F-4D97-AF65-F5344CB8AC3E}">
-        <p14:creationId xmlns:p14="http://schemas.microsoft.com/office/powerpoint/2010/main" val="3956821086"/>
+        <p14:creationId xmlns:p14="http://schemas.microsoft.com/office/powerpoint/2010/main" xmlns="" val="3956821086"/>
       </p:ext>
     </p:extLst>
   </p:cSld>
@@ -1913,7 +1929,8 @@
           <a:p>
             <a:fld id="{96253BB2-4236-4F4F-977B-76D829312D18}" type="datetimeFigureOut">
               <a:rPr lang="en-IN" smtClean="0"/>
-              <a:t>16-08-2026</a:t>
+              <a:pPr/>
+              <a:t>17-08-2026</a:t>
             </a:fld>
             <a:endParaRPr lang="en-IN"/>
           </a:p>
@@ -1955,6 +1972,7 @@
           <a:p>
             <a:fld id="{007A1CCA-7602-43D0-8C0E-FEA430C1C9B3}" type="slidenum">
               <a:rPr lang="en-IN" smtClean="0"/>
+              <a:pPr/>
               <a:t>‹#›</a:t>
             </a:fld>
             <a:endParaRPr lang="en-IN"/>
@@ -1964,7 +1982,7 @@
     </p:spTree>
     <p:extLst>
       <p:ext uri="{BB962C8B-B14F-4D97-AF65-F5344CB8AC3E}">
-        <p14:creationId xmlns:p14="http://schemas.microsoft.com/office/powerpoint/2010/main" val="957328967"/>
+        <p14:creationId xmlns:p14="http://schemas.microsoft.com/office/powerpoint/2010/main" xmlns="" val="957328967"/>
       </p:ext>
     </p:extLst>
   </p:cSld>
@@ -2190,7 +2208,8 @@
           <a:p>
             <a:fld id="{96253BB2-4236-4F4F-977B-76D829312D18}" type="datetimeFigureOut">
               <a:rPr lang="en-IN" smtClean="0"/>
-              <a:t>16-08-2026</a:t>
+              <a:pPr/>
+              <a:t>17-08-2026</a:t>
             </a:fld>
             <a:endParaRPr lang="en-IN"/>
           </a:p>
@@ -2232,6 +2251,7 @@
           <a:p>
             <a:fld id="{007A1CCA-7602-43D0-8C0E-FEA430C1C9B3}" type="slidenum">
               <a:rPr lang="en-IN" smtClean="0"/>
+              <a:pPr/>
               <a:t>‹#›</a:t>
             </a:fld>
             <a:endParaRPr lang="en-IN"/>
@@ -2241,7 +2261,7 @@
     </p:spTree>
     <p:extLst>
       <p:ext uri="{BB962C8B-B14F-4D97-AF65-F5344CB8AC3E}">
-        <p14:creationId xmlns:p14="http://schemas.microsoft.com/office/powerpoint/2010/main" val="2199451742"/>
+        <p14:creationId xmlns:p14="http://schemas.microsoft.com/office/powerpoint/2010/main" xmlns="" val="2199451742"/>
       </p:ext>
     </p:extLst>
   </p:cSld>
@@ -2447,7 +2467,8 @@
           <a:p>
             <a:fld id="{96253BB2-4236-4F4F-977B-76D829312D18}" type="datetimeFigureOut">
               <a:rPr lang="en-IN" smtClean="0"/>
-              <a:t>16-08-2026</a:t>
+              <a:pPr/>
+              <a:t>17-08-2026</a:t>
             </a:fld>
             <a:endParaRPr lang="en-IN"/>
           </a:p>
@@ -2489,6 +2510,7 @@
           <a:p>
             <a:fld id="{007A1CCA-7602-43D0-8C0E-FEA430C1C9B3}" type="slidenum">
               <a:rPr lang="en-IN" smtClean="0"/>
+              <a:pPr/>
               <a:t>‹#›</a:t>
             </a:fld>
             <a:endParaRPr lang="en-IN"/>
@@ -2498,7 +2520,7 @@
     </p:spTree>
     <p:extLst>
       <p:ext uri="{BB962C8B-B14F-4D97-AF65-F5344CB8AC3E}">
-        <p14:creationId xmlns:p14="http://schemas.microsoft.com/office/powerpoint/2010/main" val="826612127"/>
+        <p14:creationId xmlns:p14="http://schemas.microsoft.com/office/powerpoint/2010/main" xmlns="" val="826612127"/>
       </p:ext>
     </p:extLst>
   </p:cSld>
@@ -2660,7 +2682,8 @@
           <a:p>
             <a:fld id="{96253BB2-4236-4F4F-977B-76D829312D18}" type="datetimeFigureOut">
               <a:rPr lang="en-IN" smtClean="0"/>
-              <a:t>16-08-2026</a:t>
+              <a:pPr/>
+              <a:t>17-08-2026</a:t>
             </a:fld>
             <a:endParaRPr lang="en-IN"/>
           </a:p>
@@ -2738,6 +2761,7 @@
           <a:p>
             <a:fld id="{007A1CCA-7602-43D0-8C0E-FEA430C1C9B3}" type="slidenum">
               <a:rPr lang="en-IN" smtClean="0"/>
+              <a:pPr/>
               <a:t>‹#›</a:t>
             </a:fld>
             <a:endParaRPr lang="en-IN"/>
@@ -2747,7 +2771,7 @@
     </p:spTree>
     <p:extLst>
       <p:ext uri="{BB962C8B-B14F-4D97-AF65-F5344CB8AC3E}">
-        <p14:creationId xmlns:p14="http://schemas.microsoft.com/office/powerpoint/2010/main" val="1437497274"/>
+        <p14:creationId xmlns:p14="http://schemas.microsoft.com/office/powerpoint/2010/main" xmlns="" val="1437497274"/>
       </p:ext>
     </p:extLst>
   </p:cSld>
@@ -3070,7 +3094,7 @@
           <p:cNvPr id="6" name="Title 5">
             <a:extLst>
               <a:ext uri="{FF2B5EF4-FFF2-40B4-BE49-F238E27FC236}">
-                <a16:creationId xmlns:a16="http://schemas.microsoft.com/office/drawing/2014/main" id="{407341CD-AB25-A2CB-F590-1B1E3DE95130}"/>
+                <a16:creationId xmlns:a16="http://schemas.microsoft.com/office/drawing/2014/main" xmlns="" id="{407341CD-AB25-A2CB-F590-1B1E3DE95130}"/>
               </a:ext>
             </a:extLst>
           </p:cNvPr>
@@ -3103,7 +3127,7 @@
           <p:cNvPr id="10" name="Content Placeholder 9">
             <a:extLst>
               <a:ext uri="{FF2B5EF4-FFF2-40B4-BE49-F238E27FC236}">
-                <a16:creationId xmlns:a16="http://schemas.microsoft.com/office/drawing/2014/main" id="{BA48BF7A-B10D-E9CE-692C-25AAF805E6FD}"/>
+                <a16:creationId xmlns:a16="http://schemas.microsoft.com/office/drawing/2014/main" xmlns="" id="{BA48BF7A-B10D-E9CE-692C-25AAF805E6FD}"/>
               </a:ext>
             </a:extLst>
           </p:cNvPr>
@@ -3155,7 +3179,7 @@
           <p:cNvPr id="9" name="Picture 8">
             <a:extLst>
               <a:ext uri="{FF2B5EF4-FFF2-40B4-BE49-F238E27FC236}">
-                <a16:creationId xmlns:a16="http://schemas.microsoft.com/office/drawing/2014/main" id="{FF480C55-891A-9ABA-29C9-46BF59F9A8EC}"/>
+                <a16:creationId xmlns:a16="http://schemas.microsoft.com/office/drawing/2014/main" xmlns="" id="{FF480C55-891A-9ABA-29C9-46BF59F9A8EC}"/>
               </a:ext>
             </a:extLst>
           </p:cNvPr>
@@ -3165,10 +3189,10 @@
           <p:nvPr/>
         </p:nvPicPr>
         <p:blipFill>
-          <a:blip r:embed="rId2">
+          <a:blip r:embed="rId2" cstate="print">
             <a:extLst>
               <a:ext uri="{28A0092B-C50C-407E-A947-70E740481C1C}">
-                <a14:useLocalDpi xmlns:a14="http://schemas.microsoft.com/office/drawing/2010/main" val="0"/>
+                <a14:useLocalDpi xmlns:a14="http://schemas.microsoft.com/office/drawing/2010/main" xmlns="" val="0"/>
               </a:ext>
             </a:extLst>
           </a:blip>
@@ -3189,7 +3213,7 @@
     </p:spTree>
     <p:extLst>
       <p:ext uri="{BB962C8B-B14F-4D97-AF65-F5344CB8AC3E}">
-        <p14:creationId xmlns:p14="http://schemas.microsoft.com/office/powerpoint/2010/main" val="1702020714"/>
+        <p14:creationId xmlns:p14="http://schemas.microsoft.com/office/powerpoint/2010/main" xmlns="" val="1702020714"/>
       </p:ext>
     </p:extLst>
   </p:cSld>
@@ -3221,7 +3245,7 @@
           <p:cNvPr id="2" name="Title 1">
             <a:extLst>
               <a:ext uri="{FF2B5EF4-FFF2-40B4-BE49-F238E27FC236}">
-                <a16:creationId xmlns:a16="http://schemas.microsoft.com/office/drawing/2014/main" id="{BD34CE86-64C5-CD3F-06BE-F57FD1B33295}"/>
+                <a16:creationId xmlns:a16="http://schemas.microsoft.com/office/drawing/2014/main" xmlns="" id="{BD34CE86-64C5-CD3F-06BE-F57FD1B33295}"/>
               </a:ext>
             </a:extLst>
           </p:cNvPr>
@@ -3255,7 +3279,7 @@
           <p:cNvPr id="4" name="Content Placeholder 3">
             <a:extLst>
               <a:ext uri="{FF2B5EF4-FFF2-40B4-BE49-F238E27FC236}">
-                <a16:creationId xmlns:a16="http://schemas.microsoft.com/office/drawing/2014/main" id="{AF4A7421-FD71-1600-8100-D235E0EEC781}"/>
+                <a16:creationId xmlns:a16="http://schemas.microsoft.com/office/drawing/2014/main" xmlns="" id="{AF4A7421-FD71-1600-8100-D235E0EEC781}"/>
               </a:ext>
             </a:extLst>
           </p:cNvPr>
@@ -3354,7 +3378,7 @@
     </p:spTree>
     <p:extLst>
       <p:ext uri="{BB962C8B-B14F-4D97-AF65-F5344CB8AC3E}">
-        <p14:creationId xmlns:p14="http://schemas.microsoft.com/office/powerpoint/2010/main" val="217354110"/>
+        <p14:creationId xmlns:p14="http://schemas.microsoft.com/office/powerpoint/2010/main" xmlns="" val="217354110"/>
       </p:ext>
     </p:extLst>
   </p:cSld>
@@ -3386,7 +3410,7 @@
           <p:cNvPr id="2" name="Title 1">
             <a:extLst>
               <a:ext uri="{FF2B5EF4-FFF2-40B4-BE49-F238E27FC236}">
-                <a16:creationId xmlns:a16="http://schemas.microsoft.com/office/drawing/2014/main" id="{77242F7D-C366-0532-33E8-977A79298AC8}"/>
+                <a16:creationId xmlns:a16="http://schemas.microsoft.com/office/drawing/2014/main" xmlns="" id="{77242F7D-C366-0532-33E8-977A79298AC8}"/>
               </a:ext>
             </a:extLst>
           </p:cNvPr>
@@ -3420,7 +3444,7 @@
           <p:cNvPr id="3" name="Content Placeholder 2">
             <a:extLst>
               <a:ext uri="{FF2B5EF4-FFF2-40B4-BE49-F238E27FC236}">
-                <a16:creationId xmlns:a16="http://schemas.microsoft.com/office/drawing/2014/main" id="{28AFEFAD-B25D-DB98-1EFB-D6666D902A21}"/>
+                <a16:creationId xmlns:a16="http://schemas.microsoft.com/office/drawing/2014/main" xmlns="" id="{28AFEFAD-B25D-DB98-1EFB-D6666D902A21}"/>
               </a:ext>
             </a:extLst>
           </p:cNvPr>
@@ -3465,7 +3489,7 @@
     </p:spTree>
     <p:extLst>
       <p:ext uri="{BB962C8B-B14F-4D97-AF65-F5344CB8AC3E}">
-        <p14:creationId xmlns:p14="http://schemas.microsoft.com/office/powerpoint/2010/main" val="2873688785"/>
+        <p14:creationId xmlns:p14="http://schemas.microsoft.com/office/powerpoint/2010/main" xmlns="" val="2873688785"/>
       </p:ext>
     </p:extLst>
   </p:cSld>
@@ -3497,7 +3521,7 @@
           <p:cNvPr id="2" name="Title 1">
             <a:extLst>
               <a:ext uri="{FF2B5EF4-FFF2-40B4-BE49-F238E27FC236}">
-                <a16:creationId xmlns:a16="http://schemas.microsoft.com/office/drawing/2014/main" id="{9B5587BD-6B16-F736-2F22-CFA778FAF451}"/>
+                <a16:creationId xmlns:a16="http://schemas.microsoft.com/office/drawing/2014/main" xmlns="" id="{9B5587BD-6B16-F736-2F22-CFA778FAF451}"/>
               </a:ext>
             </a:extLst>
           </p:cNvPr>
@@ -3531,7 +3555,7 @@
           <p:cNvPr id="3" name="Content Placeholder 2">
             <a:extLst>
               <a:ext uri="{FF2B5EF4-FFF2-40B4-BE49-F238E27FC236}">
-                <a16:creationId xmlns:a16="http://schemas.microsoft.com/office/drawing/2014/main" id="{41FBB10E-1554-899F-4F27-AB1934C6596F}"/>
+                <a16:creationId xmlns:a16="http://schemas.microsoft.com/office/drawing/2014/main" xmlns="" id="{41FBB10E-1554-899F-4F27-AB1934C6596F}"/>
               </a:ext>
             </a:extLst>
           </p:cNvPr>
@@ -3554,7 +3578,7 @@
     </p:spTree>
     <p:extLst>
       <p:ext uri="{BB962C8B-B14F-4D97-AF65-F5344CB8AC3E}">
-        <p14:creationId xmlns:p14="http://schemas.microsoft.com/office/powerpoint/2010/main" val="24905155"/>
+        <p14:creationId xmlns:p14="http://schemas.microsoft.com/office/powerpoint/2010/main" xmlns="" val="24905155"/>
       </p:ext>
     </p:extLst>
   </p:cSld>
@@ -3586,7 +3610,7 @@
           <p:cNvPr id="2" name="Title 1">
             <a:extLst>
               <a:ext uri="{FF2B5EF4-FFF2-40B4-BE49-F238E27FC236}">
-                <a16:creationId xmlns:a16="http://schemas.microsoft.com/office/drawing/2014/main" id="{62CEF8BD-0889-D30E-EE97-F9C581EC0663}"/>
+                <a16:creationId xmlns:a16="http://schemas.microsoft.com/office/drawing/2014/main" xmlns="" id="{62CEF8BD-0889-D30E-EE97-F9C581EC0663}"/>
               </a:ext>
             </a:extLst>
           </p:cNvPr>
@@ -3620,7 +3644,7 @@
           <p:cNvPr id="3" name="Content Placeholder 2">
             <a:extLst>
               <a:ext uri="{FF2B5EF4-FFF2-40B4-BE49-F238E27FC236}">
-                <a16:creationId xmlns:a16="http://schemas.microsoft.com/office/drawing/2014/main" id="{351F1902-9281-DC80-0336-C5BB33447A11}"/>
+                <a16:creationId xmlns:a16="http://schemas.microsoft.com/office/drawing/2014/main" xmlns="" id="{351F1902-9281-DC80-0336-C5BB33447A11}"/>
               </a:ext>
             </a:extLst>
           </p:cNvPr>
@@ -3670,7 +3694,7 @@
     </p:spTree>
     <p:extLst>
       <p:ext uri="{BB962C8B-B14F-4D97-AF65-F5344CB8AC3E}">
-        <p14:creationId xmlns:p14="http://schemas.microsoft.com/office/powerpoint/2010/main" val="2419126952"/>
+        <p14:creationId xmlns:p14="http://schemas.microsoft.com/office/powerpoint/2010/main" xmlns="" val="2419126952"/>
       </p:ext>
     </p:extLst>
   </p:cSld>
@@ -3702,7 +3726,7 @@
           <p:cNvPr id="2" name="Title 1">
             <a:extLst>
               <a:ext uri="{FF2B5EF4-FFF2-40B4-BE49-F238E27FC236}">
-                <a16:creationId xmlns:a16="http://schemas.microsoft.com/office/drawing/2014/main" id="{10761989-94AA-EEB6-82B3-C24CBD5041C1}"/>
+                <a16:creationId xmlns:a16="http://schemas.microsoft.com/office/drawing/2014/main" xmlns="" id="{10761989-94AA-EEB6-82B3-C24CBD5041C1}"/>
               </a:ext>
             </a:extLst>
           </p:cNvPr>
@@ -3731,7 +3755,7 @@
           <p:cNvPr id="3" name="Content Placeholder 2">
             <a:extLst>
               <a:ext uri="{FF2B5EF4-FFF2-40B4-BE49-F238E27FC236}">
-                <a16:creationId xmlns:a16="http://schemas.microsoft.com/office/drawing/2014/main" id="{B886FDE6-8DA4-F0AB-9F89-B43BD6917A80}"/>
+                <a16:creationId xmlns:a16="http://schemas.microsoft.com/office/drawing/2014/main" xmlns="" id="{B886FDE6-8DA4-F0AB-9F89-B43BD6917A80}"/>
               </a:ext>
             </a:extLst>
           </p:cNvPr>
@@ -3795,7 +3819,7 @@
     </p:spTree>
     <p:extLst>
       <p:ext uri="{BB962C8B-B14F-4D97-AF65-F5344CB8AC3E}">
-        <p14:creationId xmlns:p14="http://schemas.microsoft.com/office/powerpoint/2010/main" val="538754358"/>
+        <p14:creationId xmlns:p14="http://schemas.microsoft.com/office/powerpoint/2010/main" xmlns="" val="538754358"/>
       </p:ext>
     </p:extLst>
   </p:cSld>
@@ -3827,7 +3851,7 @@
           <p:cNvPr id="2" name="Title 1">
             <a:extLst>
               <a:ext uri="{FF2B5EF4-FFF2-40B4-BE49-F238E27FC236}">
-                <a16:creationId xmlns:a16="http://schemas.microsoft.com/office/drawing/2014/main" id="{F5D7860E-24E9-4EC3-0857-324E3FD4FFBC}"/>
+                <a16:creationId xmlns:a16="http://schemas.microsoft.com/office/drawing/2014/main" xmlns="" id="{F5D7860E-24E9-4EC3-0857-324E3FD4FFBC}"/>
               </a:ext>
             </a:extLst>
           </p:cNvPr>
@@ -3861,7 +3885,7 @@
           <p:cNvPr id="3" name="Content Placeholder 2">
             <a:extLst>
               <a:ext uri="{FF2B5EF4-FFF2-40B4-BE49-F238E27FC236}">
-                <a16:creationId xmlns:a16="http://schemas.microsoft.com/office/drawing/2014/main" id="{EE38A2F0-9A5E-A23B-6EAF-9A17453D249B}"/>
+                <a16:creationId xmlns:a16="http://schemas.microsoft.com/office/drawing/2014/main" xmlns="" id="{EE38A2F0-9A5E-A23B-6EAF-9A17453D249B}"/>
               </a:ext>
             </a:extLst>
           </p:cNvPr>
@@ -3908,7 +3932,7 @@
     </p:spTree>
     <p:extLst>
       <p:ext uri="{BB962C8B-B14F-4D97-AF65-F5344CB8AC3E}">
-        <p14:creationId xmlns:p14="http://schemas.microsoft.com/office/powerpoint/2010/main" val="2131063344"/>
+        <p14:creationId xmlns:p14="http://schemas.microsoft.com/office/powerpoint/2010/main" xmlns="" val="2131063344"/>
       </p:ext>
     </p:extLst>
   </p:cSld>
@@ -3940,7 +3964,7 @@
           <p:cNvPr id="2" name="Title 1">
             <a:extLst>
               <a:ext uri="{FF2B5EF4-FFF2-40B4-BE49-F238E27FC236}">
-                <a16:creationId xmlns:a16="http://schemas.microsoft.com/office/drawing/2014/main" id="{05725DA0-A9A3-C837-EB53-2E692EC7B6FF}"/>
+                <a16:creationId xmlns:a16="http://schemas.microsoft.com/office/drawing/2014/main" xmlns="" id="{05725DA0-A9A3-C837-EB53-2E692EC7B6FF}"/>
               </a:ext>
             </a:extLst>
           </p:cNvPr>
@@ -3979,7 +4003,7 @@
     </p:spTree>
     <p:extLst>
       <p:ext uri="{BB962C8B-B14F-4D97-AF65-F5344CB8AC3E}">
-        <p14:creationId xmlns:p14="http://schemas.microsoft.com/office/powerpoint/2010/main" val="2816051890"/>
+        <p14:creationId xmlns:p14="http://schemas.microsoft.com/office/powerpoint/2010/main" xmlns="" val="2816051890"/>
       </p:ext>
     </p:extLst>
   </p:cSld>
@@ -4032,7 +4056,7 @@
     </a:clrScheme>
     <a:fontScheme name="Office 2013 - 2022 Theme">
       <a:majorFont>
-        <a:latin typeface="Calibri Light" panose="020F0302020204030204"/>
+        <a:latin typeface="Calibri Light"/>
         <a:ea typeface=""/>
         <a:cs typeface=""/>
         <a:font script="Jpan" typeface="游ゴシック Light"/>
@@ -4067,7 +4091,7 @@
         <a:font script="Geor" typeface="Sylfaen"/>
       </a:majorFont>
       <a:minorFont>
-        <a:latin typeface="Calibri" panose="020F0502020204030204"/>
+        <a:latin typeface="Calibri"/>
         <a:ea typeface=""/>
         <a:cs typeface=""/>
         <a:font script="Jpan" typeface="游ゴシック"/>
@@ -4244,7 +4268,7 @@
   <a:extraClrSchemeLst/>
   <a:extLst>
     <a:ext uri="{05A4C25C-085E-4340-85A3-A5531E510DB2}">
-      <thm15:themeFamily xmlns:thm15="http://schemas.microsoft.com/office/thememl/2012/main" name="Office 2013 - 2022 Theme" id="{62F939B6-93AF-4DB8-9C6B-D6C7DFDC589F}" vid="{4A3C46E8-61CC-4603-A589-7422A47A8E4A}"/>
+      <thm15:themeFamily xmlns:thm15="http://schemas.microsoft.com/office/thememl/2012/main" xmlns="" name="Office 2013 - 2022 Theme" id="{62F939B6-93AF-4DB8-9C6B-D6C7DFDC589F}" vid="{4A3C46E8-61CC-4603-A589-7422A47A8E4A}"/>
     </a:ext>
   </a:extLst>
 </a:theme>
